--- a/ゲーム科3年/00_前期/オンラインゲームプログラミングⅠ/03_通信方式.pptx
+++ b/ゲーム科3年/00_前期/オンラインゲームプログラミングⅠ/03_通信方式.pptx
@@ -265,7 +265,7 @@
           <a:p>
             <a:fld id="{E9CC885B-4903-4D54-9A93-00025F12DED9}" type="datetimeFigureOut">
               <a:rPr kumimoji="1" lang="ja-JP" altLang="en-US" smtClean="0"/>
-              <a:t>2025/10/8</a:t>
+              <a:t>2025/10/30</a:t>
             </a:fld>
             <a:endParaRPr kumimoji="1" lang="ja-JP" altLang="en-US"/>
           </a:p>
@@ -495,7 +495,7 @@
           <a:p>
             <a:fld id="{E9CC885B-4903-4D54-9A93-00025F12DED9}" type="datetimeFigureOut">
               <a:rPr kumimoji="1" lang="ja-JP" altLang="en-US" smtClean="0"/>
-              <a:t>2025/10/8</a:t>
+              <a:t>2025/10/30</a:t>
             </a:fld>
             <a:endParaRPr kumimoji="1" lang="ja-JP" altLang="en-US"/>
           </a:p>
@@ -735,7 +735,7 @@
           <a:p>
             <a:fld id="{E9CC885B-4903-4D54-9A93-00025F12DED9}" type="datetimeFigureOut">
               <a:rPr kumimoji="1" lang="ja-JP" altLang="en-US" smtClean="0"/>
-              <a:t>2025/10/8</a:t>
+              <a:t>2025/10/30</a:t>
             </a:fld>
             <a:endParaRPr kumimoji="1" lang="ja-JP" altLang="en-US"/>
           </a:p>
@@ -965,7 +965,7 @@
           <a:p>
             <a:fld id="{E9CC885B-4903-4D54-9A93-00025F12DED9}" type="datetimeFigureOut">
               <a:rPr kumimoji="1" lang="ja-JP" altLang="en-US" smtClean="0"/>
-              <a:t>2025/10/8</a:t>
+              <a:t>2025/10/30</a:t>
             </a:fld>
             <a:endParaRPr kumimoji="1" lang="ja-JP" altLang="en-US"/>
           </a:p>
@@ -1240,7 +1240,7 @@
           <a:p>
             <a:fld id="{E9CC885B-4903-4D54-9A93-00025F12DED9}" type="datetimeFigureOut">
               <a:rPr kumimoji="1" lang="ja-JP" altLang="en-US" smtClean="0"/>
-              <a:t>2025/10/8</a:t>
+              <a:t>2025/10/30</a:t>
             </a:fld>
             <a:endParaRPr kumimoji="1" lang="ja-JP" altLang="en-US"/>
           </a:p>
@@ -1569,7 +1569,7 @@
           <a:p>
             <a:fld id="{E9CC885B-4903-4D54-9A93-00025F12DED9}" type="datetimeFigureOut">
               <a:rPr kumimoji="1" lang="ja-JP" altLang="en-US" smtClean="0"/>
-              <a:t>2025/10/8</a:t>
+              <a:t>2025/10/30</a:t>
             </a:fld>
             <a:endParaRPr kumimoji="1" lang="ja-JP" altLang="en-US"/>
           </a:p>
@@ -2045,7 +2045,7 @@
           <a:p>
             <a:fld id="{E9CC885B-4903-4D54-9A93-00025F12DED9}" type="datetimeFigureOut">
               <a:rPr kumimoji="1" lang="ja-JP" altLang="en-US" smtClean="0"/>
-              <a:t>2025/10/8</a:t>
+              <a:t>2025/10/30</a:t>
             </a:fld>
             <a:endParaRPr kumimoji="1" lang="ja-JP" altLang="en-US"/>
           </a:p>
@@ -2186,7 +2186,7 @@
           <a:p>
             <a:fld id="{E9CC885B-4903-4D54-9A93-00025F12DED9}" type="datetimeFigureOut">
               <a:rPr kumimoji="1" lang="ja-JP" altLang="en-US" smtClean="0"/>
-              <a:t>2025/10/8</a:t>
+              <a:t>2025/10/30</a:t>
             </a:fld>
             <a:endParaRPr kumimoji="1" lang="ja-JP" altLang="en-US"/>
           </a:p>
@@ -2299,7 +2299,7 @@
           <a:p>
             <a:fld id="{E9CC885B-4903-4D54-9A93-00025F12DED9}" type="datetimeFigureOut">
               <a:rPr kumimoji="1" lang="ja-JP" altLang="en-US" smtClean="0"/>
-              <a:t>2025/10/8</a:t>
+              <a:t>2025/10/30</a:t>
             </a:fld>
             <a:endParaRPr kumimoji="1" lang="ja-JP" altLang="en-US"/>
           </a:p>
@@ -2642,7 +2642,7 @@
           <a:p>
             <a:fld id="{E9CC885B-4903-4D54-9A93-00025F12DED9}" type="datetimeFigureOut">
               <a:rPr kumimoji="1" lang="ja-JP" altLang="en-US" smtClean="0"/>
-              <a:t>2025/10/8</a:t>
+              <a:t>2025/10/30</a:t>
             </a:fld>
             <a:endParaRPr kumimoji="1" lang="ja-JP" altLang="en-US"/>
           </a:p>
@@ -2930,7 +2930,7 @@
           <a:p>
             <a:fld id="{E9CC885B-4903-4D54-9A93-00025F12DED9}" type="datetimeFigureOut">
               <a:rPr kumimoji="1" lang="ja-JP" altLang="en-US" smtClean="0"/>
-              <a:t>2025/10/8</a:t>
+              <a:t>2025/10/30</a:t>
             </a:fld>
             <a:endParaRPr kumimoji="1" lang="ja-JP" altLang="en-US"/>
           </a:p>
@@ -3203,7 +3203,7 @@
           <a:p>
             <a:fld id="{E9CC885B-4903-4D54-9A93-00025F12DED9}" type="datetimeFigureOut">
               <a:rPr kumimoji="1" lang="ja-JP" altLang="en-US" smtClean="0"/>
-              <a:t>2025/10/8</a:t>
+              <a:t>2025/10/30</a:t>
             </a:fld>
             <a:endParaRPr kumimoji="1" lang="ja-JP" altLang="en-US"/>
           </a:p>
@@ -5973,7 +5973,7 @@
           <a:p>
             <a:r>
               <a:rPr lang="ja-JP" altLang="en-US" sz="2400" dirty="0"/>
-              <a:t>・デバッグが大変（クライアント側？サーバー側？）</a:t>
+              <a:t>・デバッグが大変（この不具合はクライアント側？サーバー側？）</a:t>
             </a:r>
             <a:endParaRPr lang="en-US" altLang="ja-JP" sz="2400" dirty="0"/>
           </a:p>

--- a/ゲーム科3年/00_前期/オンラインゲームプログラミングⅠ/03_通信方式.pptx
+++ b/ゲーム科3年/00_前期/オンラインゲームプログラミングⅠ/03_通信方式.pptx
@@ -265,7 +265,7 @@
           <a:p>
             <a:fld id="{E9CC885B-4903-4D54-9A93-00025F12DED9}" type="datetimeFigureOut">
               <a:rPr kumimoji="1" lang="ja-JP" altLang="en-US" smtClean="0"/>
-              <a:t>2025/10/30</a:t>
+              <a:t>2025/12/12</a:t>
             </a:fld>
             <a:endParaRPr kumimoji="1" lang="ja-JP" altLang="en-US"/>
           </a:p>
@@ -495,7 +495,7 @@
           <a:p>
             <a:fld id="{E9CC885B-4903-4D54-9A93-00025F12DED9}" type="datetimeFigureOut">
               <a:rPr kumimoji="1" lang="ja-JP" altLang="en-US" smtClean="0"/>
-              <a:t>2025/10/30</a:t>
+              <a:t>2025/12/12</a:t>
             </a:fld>
             <a:endParaRPr kumimoji="1" lang="ja-JP" altLang="en-US"/>
           </a:p>
@@ -735,7 +735,7 @@
           <a:p>
             <a:fld id="{E9CC885B-4903-4D54-9A93-00025F12DED9}" type="datetimeFigureOut">
               <a:rPr kumimoji="1" lang="ja-JP" altLang="en-US" smtClean="0"/>
-              <a:t>2025/10/30</a:t>
+              <a:t>2025/12/12</a:t>
             </a:fld>
             <a:endParaRPr kumimoji="1" lang="ja-JP" altLang="en-US"/>
           </a:p>
@@ -965,7 +965,7 @@
           <a:p>
             <a:fld id="{E9CC885B-4903-4D54-9A93-00025F12DED9}" type="datetimeFigureOut">
               <a:rPr kumimoji="1" lang="ja-JP" altLang="en-US" smtClean="0"/>
-              <a:t>2025/10/30</a:t>
+              <a:t>2025/12/12</a:t>
             </a:fld>
             <a:endParaRPr kumimoji="1" lang="ja-JP" altLang="en-US"/>
           </a:p>
@@ -1240,7 +1240,7 @@
           <a:p>
             <a:fld id="{E9CC885B-4903-4D54-9A93-00025F12DED9}" type="datetimeFigureOut">
               <a:rPr kumimoji="1" lang="ja-JP" altLang="en-US" smtClean="0"/>
-              <a:t>2025/10/30</a:t>
+              <a:t>2025/12/12</a:t>
             </a:fld>
             <a:endParaRPr kumimoji="1" lang="ja-JP" altLang="en-US"/>
           </a:p>
@@ -1569,7 +1569,7 @@
           <a:p>
             <a:fld id="{E9CC885B-4903-4D54-9A93-00025F12DED9}" type="datetimeFigureOut">
               <a:rPr kumimoji="1" lang="ja-JP" altLang="en-US" smtClean="0"/>
-              <a:t>2025/10/30</a:t>
+              <a:t>2025/12/12</a:t>
             </a:fld>
             <a:endParaRPr kumimoji="1" lang="ja-JP" altLang="en-US"/>
           </a:p>
@@ -2045,7 +2045,7 @@
           <a:p>
             <a:fld id="{E9CC885B-4903-4D54-9A93-00025F12DED9}" type="datetimeFigureOut">
               <a:rPr kumimoji="1" lang="ja-JP" altLang="en-US" smtClean="0"/>
-              <a:t>2025/10/30</a:t>
+              <a:t>2025/12/12</a:t>
             </a:fld>
             <a:endParaRPr kumimoji="1" lang="ja-JP" altLang="en-US"/>
           </a:p>
@@ -2186,7 +2186,7 @@
           <a:p>
             <a:fld id="{E9CC885B-4903-4D54-9A93-00025F12DED9}" type="datetimeFigureOut">
               <a:rPr kumimoji="1" lang="ja-JP" altLang="en-US" smtClean="0"/>
-              <a:t>2025/10/30</a:t>
+              <a:t>2025/12/12</a:t>
             </a:fld>
             <a:endParaRPr kumimoji="1" lang="ja-JP" altLang="en-US"/>
           </a:p>
@@ -2299,7 +2299,7 @@
           <a:p>
             <a:fld id="{E9CC885B-4903-4D54-9A93-00025F12DED9}" type="datetimeFigureOut">
               <a:rPr kumimoji="1" lang="ja-JP" altLang="en-US" smtClean="0"/>
-              <a:t>2025/10/30</a:t>
+              <a:t>2025/12/12</a:t>
             </a:fld>
             <a:endParaRPr kumimoji="1" lang="ja-JP" altLang="en-US"/>
           </a:p>
@@ -2642,7 +2642,7 @@
           <a:p>
             <a:fld id="{E9CC885B-4903-4D54-9A93-00025F12DED9}" type="datetimeFigureOut">
               <a:rPr kumimoji="1" lang="ja-JP" altLang="en-US" smtClean="0"/>
-              <a:t>2025/10/30</a:t>
+              <a:t>2025/12/12</a:t>
             </a:fld>
             <a:endParaRPr kumimoji="1" lang="ja-JP" altLang="en-US"/>
           </a:p>
@@ -2930,7 +2930,7 @@
           <a:p>
             <a:fld id="{E9CC885B-4903-4D54-9A93-00025F12DED9}" type="datetimeFigureOut">
               <a:rPr kumimoji="1" lang="ja-JP" altLang="en-US" smtClean="0"/>
-              <a:t>2025/10/30</a:t>
+              <a:t>2025/12/12</a:t>
             </a:fld>
             <a:endParaRPr kumimoji="1" lang="ja-JP" altLang="en-US"/>
           </a:p>
@@ -3203,7 +3203,7 @@
           <a:p>
             <a:fld id="{E9CC885B-4903-4D54-9A93-00025F12DED9}" type="datetimeFigureOut">
               <a:rPr kumimoji="1" lang="ja-JP" altLang="en-US" smtClean="0"/>
-              <a:t>2025/10/30</a:t>
+              <a:t>2025/12/12</a:t>
             </a:fld>
             <a:endParaRPr kumimoji="1" lang="ja-JP" altLang="en-US"/>
           </a:p>
@@ -3932,7 +3932,7 @@
           <a:p>
             <a:r>
               <a:rPr lang="ja-JP" altLang="en-US" sz="2400" dirty="0"/>
-              <a:t>まずは軸となる方式を学びましょう。</a:t>
+              <a:t>まずは軸となるこれらの方式を学びましょう。</a:t>
             </a:r>
             <a:endParaRPr kumimoji="1" lang="en-US" altLang="ja-JP" sz="2400" dirty="0"/>
           </a:p>
@@ -5823,7 +5823,7 @@
         <p:spPr>
           <a:xfrm>
             <a:off x="567542" y="1216429"/>
-            <a:ext cx="10865475" cy="5262979"/>
+            <a:ext cx="11899411" cy="5262979"/>
           </a:xfrm>
           <a:prstGeom prst="rect">
             <a:avLst/>
@@ -5920,7 +5920,15 @@
           <a:p>
             <a:r>
               <a:rPr lang="ja-JP" altLang="en-US" sz="2400" dirty="0"/>
-              <a:t>・サーバー側の開発と、クライアント、サーバー間の連携が必要（</a:t>
+              <a:t>・サーバー側の開発、クライアント</a:t>
+            </a:r>
+            <a:r>
+              <a:rPr lang="en-US" altLang="ja-JP" sz="2400" dirty="0"/>
+              <a:t>/</a:t>
+            </a:r>
+            <a:r>
+              <a:rPr lang="ja-JP" altLang="en-US" sz="2400" dirty="0"/>
+              <a:t>サーバー間の連携が必要（</a:t>
             </a:r>
             <a:r>
               <a:rPr lang="en-US" altLang="ja-JP" sz="2400" b="1" dirty="0">
@@ -5928,7 +5936,7 @@
                   <a:srgbClr val="FF0000"/>
                 </a:solidFill>
               </a:rPr>
-              <a:t>API</a:t>
+              <a:t>API/Handler</a:t>
             </a:r>
             <a:r>
               <a:rPr lang="ja-JP" altLang="en-US" sz="2400" b="1" dirty="0">

--- a/ゲーム科3年/00_前期/オンラインゲームプログラミングⅠ/03_通信方式.pptx
+++ b/ゲーム科3年/00_前期/オンラインゲームプログラミングⅠ/03_通信方式.pptx
@@ -265,7 +265,7 @@
           <a:p>
             <a:fld id="{E9CC885B-4903-4D54-9A93-00025F12DED9}" type="datetimeFigureOut">
               <a:rPr kumimoji="1" lang="ja-JP" altLang="en-US" smtClean="0"/>
-              <a:t>2025/12/12</a:t>
+              <a:t>2026/5/18</a:t>
             </a:fld>
             <a:endParaRPr kumimoji="1" lang="ja-JP" altLang="en-US"/>
           </a:p>
@@ -495,7 +495,7 @@
           <a:p>
             <a:fld id="{E9CC885B-4903-4D54-9A93-00025F12DED9}" type="datetimeFigureOut">
               <a:rPr kumimoji="1" lang="ja-JP" altLang="en-US" smtClean="0"/>
-              <a:t>2025/12/12</a:t>
+              <a:t>2026/5/18</a:t>
             </a:fld>
             <a:endParaRPr kumimoji="1" lang="ja-JP" altLang="en-US"/>
           </a:p>
@@ -735,7 +735,7 @@
           <a:p>
             <a:fld id="{E9CC885B-4903-4D54-9A93-00025F12DED9}" type="datetimeFigureOut">
               <a:rPr kumimoji="1" lang="ja-JP" altLang="en-US" smtClean="0"/>
-              <a:t>2025/12/12</a:t>
+              <a:t>2026/5/18</a:t>
             </a:fld>
             <a:endParaRPr kumimoji="1" lang="ja-JP" altLang="en-US"/>
           </a:p>
@@ -965,7 +965,7 @@
           <a:p>
             <a:fld id="{E9CC885B-4903-4D54-9A93-00025F12DED9}" type="datetimeFigureOut">
               <a:rPr kumimoji="1" lang="ja-JP" altLang="en-US" smtClean="0"/>
-              <a:t>2025/12/12</a:t>
+              <a:t>2026/5/18</a:t>
             </a:fld>
             <a:endParaRPr kumimoji="1" lang="ja-JP" altLang="en-US"/>
           </a:p>
@@ -1240,7 +1240,7 @@
           <a:p>
             <a:fld id="{E9CC885B-4903-4D54-9A93-00025F12DED9}" type="datetimeFigureOut">
               <a:rPr kumimoji="1" lang="ja-JP" altLang="en-US" smtClean="0"/>
-              <a:t>2025/12/12</a:t>
+              <a:t>2026/5/18</a:t>
             </a:fld>
             <a:endParaRPr kumimoji="1" lang="ja-JP" altLang="en-US"/>
           </a:p>
@@ -1569,7 +1569,7 @@
           <a:p>
             <a:fld id="{E9CC885B-4903-4D54-9A93-00025F12DED9}" type="datetimeFigureOut">
               <a:rPr kumimoji="1" lang="ja-JP" altLang="en-US" smtClean="0"/>
-              <a:t>2025/12/12</a:t>
+              <a:t>2026/5/18</a:t>
             </a:fld>
             <a:endParaRPr kumimoji="1" lang="ja-JP" altLang="en-US"/>
           </a:p>
@@ -2045,7 +2045,7 @@
           <a:p>
             <a:fld id="{E9CC885B-4903-4D54-9A93-00025F12DED9}" type="datetimeFigureOut">
               <a:rPr kumimoji="1" lang="ja-JP" altLang="en-US" smtClean="0"/>
-              <a:t>2025/12/12</a:t>
+              <a:t>2026/5/18</a:t>
             </a:fld>
             <a:endParaRPr kumimoji="1" lang="ja-JP" altLang="en-US"/>
           </a:p>
@@ -2186,7 +2186,7 @@
           <a:p>
             <a:fld id="{E9CC885B-4903-4D54-9A93-00025F12DED9}" type="datetimeFigureOut">
               <a:rPr kumimoji="1" lang="ja-JP" altLang="en-US" smtClean="0"/>
-              <a:t>2025/12/12</a:t>
+              <a:t>2026/5/18</a:t>
             </a:fld>
             <a:endParaRPr kumimoji="1" lang="ja-JP" altLang="en-US"/>
           </a:p>
@@ -2299,7 +2299,7 @@
           <a:p>
             <a:fld id="{E9CC885B-4903-4D54-9A93-00025F12DED9}" type="datetimeFigureOut">
               <a:rPr kumimoji="1" lang="ja-JP" altLang="en-US" smtClean="0"/>
-              <a:t>2025/12/12</a:t>
+              <a:t>2026/5/18</a:t>
             </a:fld>
             <a:endParaRPr kumimoji="1" lang="ja-JP" altLang="en-US"/>
           </a:p>
@@ -2642,7 +2642,7 @@
           <a:p>
             <a:fld id="{E9CC885B-4903-4D54-9A93-00025F12DED9}" type="datetimeFigureOut">
               <a:rPr kumimoji="1" lang="ja-JP" altLang="en-US" smtClean="0"/>
-              <a:t>2025/12/12</a:t>
+              <a:t>2026/5/18</a:t>
             </a:fld>
             <a:endParaRPr kumimoji="1" lang="ja-JP" altLang="en-US"/>
           </a:p>
@@ -2930,7 +2930,7 @@
           <a:p>
             <a:fld id="{E9CC885B-4903-4D54-9A93-00025F12DED9}" type="datetimeFigureOut">
               <a:rPr kumimoji="1" lang="ja-JP" altLang="en-US" smtClean="0"/>
-              <a:t>2025/12/12</a:t>
+              <a:t>2026/5/18</a:t>
             </a:fld>
             <a:endParaRPr kumimoji="1" lang="ja-JP" altLang="en-US"/>
           </a:p>
@@ -3203,7 +3203,7 @@
           <a:p>
             <a:fld id="{E9CC885B-4903-4D54-9A93-00025F12DED9}" type="datetimeFigureOut">
               <a:rPr kumimoji="1" lang="ja-JP" altLang="en-US" smtClean="0"/>
-              <a:t>2025/12/12</a:t>
+              <a:t>2026/5/18</a:t>
             </a:fld>
             <a:endParaRPr kumimoji="1" lang="ja-JP" altLang="en-US"/>
           </a:p>
@@ -3670,7 +3670,7 @@
         <p:spPr>
           <a:xfrm>
             <a:off x="567542" y="1216429"/>
-            <a:ext cx="9417963" cy="1938992"/>
+            <a:ext cx="8802410" cy="1938992"/>
           </a:xfrm>
           <a:prstGeom prst="rect">
             <a:avLst/>
@@ -3685,7 +3685,7 @@
           <a:p>
             <a:r>
               <a:rPr kumimoji="1" lang="ja-JP" altLang="en-US" sz="2400" dirty="0"/>
-              <a:t>データ通信は、</a:t>
+              <a:t>通信では、</a:t>
             </a:r>
             <a:r>
               <a:rPr kumimoji="1" lang="ja-JP" altLang="en-US" sz="2400" b="1" dirty="0">
@@ -3712,7 +3712,7 @@
                   <a:srgbClr val="FF0000"/>
                 </a:solidFill>
               </a:rPr>
-              <a:t>ユーザーはクライアントを操作</a:t>
+              <a:t>ユーザーがクライアントを操作</a:t>
             </a:r>
             <a:r>
               <a:rPr lang="ja-JP" altLang="en-US" sz="2400" dirty="0"/>
